--- a/test/c_es_up.pptx
+++ b/test/c_es_up.pptx
@@ -3097,7 +3097,7 @@
         <p:spPr>
           <a:xfrm>
             <a:off x="0" y="0"/>
-            <a:ext cx="6858000" cy="6333793"/>
+            <a:ext cx="6858000" cy="2873064"/>
           </a:xfrm>
           <a:custGeom>
             <a:avLst/>
@@ -3106,381 +3106,1056 @@
             <a:cxnLst/>
             <a:rect l="l" t="t" r="r" b="b"/>
             <a:pathLst>
-              <a:path w="6858000" h="6333793">
+              <a:path w="6858000" h="2873064">
                 <a:moveTo>
-                  <a:pt x="0" y="4156177"/>
+                  <a:pt x="0" y="1904914"/>
                 </a:moveTo>
                 <a:lnTo>
-                  <a:pt x="5231" y="3861448"/>
-                </a:lnTo>
-                <a:lnTo>
-                  <a:pt x="20899" y="3568203"/>
-                </a:lnTo>
-                <a:lnTo>
-                  <a:pt x="46924" y="3277918"/>
-                </a:lnTo>
-                <a:lnTo>
-                  <a:pt x="83176" y="2992055"/>
-                </a:lnTo>
-                <a:lnTo>
-                  <a:pt x="129473" y="2712053"/>
-                </a:lnTo>
-                <a:lnTo>
-                  <a:pt x="185580" y="2439321"/>
-                </a:lnTo>
-                <a:lnTo>
-                  <a:pt x="251215" y="2175233"/>
-                </a:lnTo>
-                <a:lnTo>
-                  <a:pt x="326049" y="1921118"/>
-                </a:lnTo>
-                <a:lnTo>
-                  <a:pt x="409704" y="1678256"/>
-                </a:lnTo>
-                <a:lnTo>
-                  <a:pt x="501759" y="1447870"/>
-                </a:lnTo>
-                <a:lnTo>
-                  <a:pt x="601751" y="1231118"/>
-                </a:lnTo>
-                <a:lnTo>
-                  <a:pt x="709176" y="1029093"/>
-                </a:lnTo>
-                <a:lnTo>
-                  <a:pt x="823493" y="842812"/>
-                </a:lnTo>
-                <a:lnTo>
-                  <a:pt x="944127" y="673212"/>
-                </a:lnTo>
-                <a:lnTo>
-                  <a:pt x="1070471" y="521148"/>
-                </a:lnTo>
-                <a:lnTo>
-                  <a:pt x="1201888" y="387384"/>
-                </a:lnTo>
-                <a:lnTo>
-                  <a:pt x="1337717" y="272595"/>
-                </a:lnTo>
-                <a:lnTo>
-                  <a:pt x="1477274" y="177358"/>
-                </a:lnTo>
-                <a:lnTo>
-                  <a:pt x="1619857" y="102153"/>
-                </a:lnTo>
-                <a:lnTo>
-                  <a:pt x="1764746" y="47358"/>
-                </a:lnTo>
-                <a:lnTo>
-                  <a:pt x="1911214" y="13250"/>
-                </a:lnTo>
-                <a:lnTo>
-                  <a:pt x="2058522" y="0"/>
-                </a:lnTo>
-                <a:lnTo>
-                  <a:pt x="2205930" y="7674"/>
-                </a:lnTo>
-                <a:lnTo>
-                  <a:pt x="2352694" y="36234"/>
-                </a:lnTo>
-                <a:lnTo>
-                  <a:pt x="2498076" y="85537"/>
-                </a:lnTo>
-                <a:lnTo>
-                  <a:pt x="2641344" y="155334"/>
-                </a:lnTo>
-                <a:lnTo>
-                  <a:pt x="2781777" y="245273"/>
-                </a:lnTo>
-                <a:lnTo>
-                  <a:pt x="2918668" y="354902"/>
-                </a:lnTo>
-                <a:lnTo>
-                  <a:pt x="3051327" y="483670"/>
-                </a:lnTo>
-                <a:lnTo>
-                  <a:pt x="3179086" y="630926"/>
-                </a:lnTo>
-                <a:lnTo>
-                  <a:pt x="3301303" y="795931"/>
-                </a:lnTo>
-                <a:lnTo>
-                  <a:pt x="3417362" y="977854"/>
-                </a:lnTo>
-                <a:lnTo>
-                  <a:pt x="3526679" y="1175778"/>
-                </a:lnTo>
-                <a:lnTo>
-                  <a:pt x="3628703" y="1388707"/>
-                </a:lnTo>
-                <a:lnTo>
-                  <a:pt x="3722921" y="1615570"/>
-                </a:lnTo>
-                <a:lnTo>
-                  <a:pt x="3808858" y="1855223"/>
-                </a:lnTo>
-                <a:lnTo>
-                  <a:pt x="3886082" y="2106461"/>
-                </a:lnTo>
-                <a:lnTo>
-                  <a:pt x="3954204" y="2368018"/>
-                </a:lnTo>
-                <a:lnTo>
-                  <a:pt x="4012881" y="2638578"/>
-                </a:lnTo>
-                <a:lnTo>
-                  <a:pt x="4061818" y="2916779"/>
-                </a:lnTo>
-                <a:lnTo>
-                  <a:pt x="4100767" y="3201219"/>
-                </a:lnTo>
-                <a:lnTo>
-                  <a:pt x="4129534" y="3490467"/>
-                </a:lnTo>
-                <a:lnTo>
-                  <a:pt x="4147973" y="3783067"/>
-                </a:lnTo>
-                <a:lnTo>
-                  <a:pt x="4155991" y="4077545"/>
-                </a:lnTo>
-                <a:lnTo>
-                  <a:pt x="4153549" y="4372419"/>
-                </a:lnTo>
-                <a:lnTo>
-                  <a:pt x="4140657" y="4666205"/>
-                </a:lnTo>
-                <a:lnTo>
-                  <a:pt x="4117382" y="4957422"/>
-                </a:lnTo>
-                <a:lnTo>
-                  <a:pt x="4083841" y="5244606"/>
-                </a:lnTo>
-                <a:lnTo>
-                  <a:pt x="4040202" y="5526310"/>
-                </a:lnTo>
-                <a:lnTo>
-                  <a:pt x="4040202" y="5526310"/>
-                </a:lnTo>
-                <a:lnTo>
-                  <a:pt x="4016571" y="5640268"/>
-                </a:lnTo>
-                <a:lnTo>
-                  <a:pt x="3986403" y="5749112"/>
-                </a:lnTo>
-                <a:lnTo>
-                  <a:pt x="3950034" y="5851631"/>
-                </a:lnTo>
-                <a:lnTo>
-                  <a:pt x="3907868" y="5946684"/>
-                </a:lnTo>
-                <a:lnTo>
-                  <a:pt x="3860374" y="6033213"/>
-                </a:lnTo>
-                <a:lnTo>
-                  <a:pt x="3808081" y="6110257"/>
-                </a:lnTo>
-                <a:lnTo>
-                  <a:pt x="3751571" y="6176958"/>
-                </a:lnTo>
-                <a:lnTo>
-                  <a:pt x="3691471" y="6232573"/>
-                </a:lnTo>
-                <a:lnTo>
-                  <a:pt x="3628452" y="6276485"/>
-                </a:lnTo>
-                <a:lnTo>
-                  <a:pt x="3563214" y="6308204"/>
-                </a:lnTo>
-                <a:lnTo>
-                  <a:pt x="3496482" y="6327378"/>
-                </a:lnTo>
-                <a:lnTo>
-                  <a:pt x="3429000" y="6333793"/>
-                </a:lnTo>
-                <a:lnTo>
-                  <a:pt x="3361517" y="6327378"/>
-                </a:lnTo>
-                <a:lnTo>
-                  <a:pt x="3294785" y="6308204"/>
-                </a:lnTo>
-                <a:lnTo>
-                  <a:pt x="3229547" y="6276485"/>
-                </a:lnTo>
-                <a:lnTo>
-                  <a:pt x="3166528" y="6232573"/>
-                </a:lnTo>
-                <a:lnTo>
-                  <a:pt x="3106428" y="6176958"/>
-                </a:lnTo>
-                <a:lnTo>
-                  <a:pt x="3049918" y="6110257"/>
-                </a:lnTo>
-                <a:lnTo>
-                  <a:pt x="2997625" y="6033213"/>
-                </a:lnTo>
-                <a:lnTo>
-                  <a:pt x="2950131" y="5946684"/>
-                </a:lnTo>
-                <a:lnTo>
-                  <a:pt x="2907965" y="5851631"/>
-                </a:lnTo>
-                <a:lnTo>
-                  <a:pt x="2871596" y="5749112"/>
-                </a:lnTo>
-                <a:lnTo>
-                  <a:pt x="2841428" y="5640268"/>
-                </a:lnTo>
-                <a:lnTo>
-                  <a:pt x="2817797" y="5526310"/>
-                </a:lnTo>
-                <a:lnTo>
-                  <a:pt x="2817797" y="5526310"/>
-                </a:lnTo>
-                <a:lnTo>
-                  <a:pt x="2774158" y="5244606"/>
-                </a:lnTo>
-                <a:lnTo>
-                  <a:pt x="2740617" y="4957422"/>
-                </a:lnTo>
-                <a:lnTo>
-                  <a:pt x="2717342" y="4666205"/>
-                </a:lnTo>
-                <a:lnTo>
-                  <a:pt x="2704450" y="4372419"/>
-                </a:lnTo>
-                <a:lnTo>
-                  <a:pt x="2702008" y="4077545"/>
-                </a:lnTo>
-                <a:lnTo>
-                  <a:pt x="2710026" y="3783067"/>
-                </a:lnTo>
-                <a:lnTo>
-                  <a:pt x="2728465" y="3490467"/>
-                </a:lnTo>
-                <a:lnTo>
-                  <a:pt x="2757232" y="3201219"/>
-                </a:lnTo>
-                <a:lnTo>
-                  <a:pt x="2796181" y="2916779"/>
-                </a:lnTo>
-                <a:lnTo>
-                  <a:pt x="2845118" y="2638578"/>
-                </a:lnTo>
-                <a:lnTo>
-                  <a:pt x="2903795" y="2368018"/>
-                </a:lnTo>
-                <a:lnTo>
-                  <a:pt x="2971917" y="2106461"/>
-                </a:lnTo>
-                <a:lnTo>
-                  <a:pt x="3049141" y="1855223"/>
-                </a:lnTo>
-                <a:lnTo>
-                  <a:pt x="3135078" y="1615570"/>
-                </a:lnTo>
-                <a:lnTo>
-                  <a:pt x="3229296" y="1388707"/>
-                </a:lnTo>
-                <a:lnTo>
-                  <a:pt x="3331320" y="1175778"/>
-                </a:lnTo>
-                <a:lnTo>
-                  <a:pt x="3440637" y="977854"/>
-                </a:lnTo>
-                <a:lnTo>
-                  <a:pt x="3556696" y="795931"/>
-                </a:lnTo>
-                <a:lnTo>
-                  <a:pt x="3678913" y="630926"/>
-                </a:lnTo>
-                <a:lnTo>
-                  <a:pt x="3806672" y="483670"/>
-                </a:lnTo>
-                <a:lnTo>
-                  <a:pt x="3939331" y="354902"/>
-                </a:lnTo>
-                <a:lnTo>
-                  <a:pt x="4076222" y="245273"/>
-                </a:lnTo>
-                <a:lnTo>
-                  <a:pt x="4216655" y="155334"/>
-                </a:lnTo>
-                <a:lnTo>
-                  <a:pt x="4359923" y="85537"/>
-                </a:lnTo>
-                <a:lnTo>
-                  <a:pt x="4505305" y="36234"/>
-                </a:lnTo>
-                <a:lnTo>
-                  <a:pt x="4652069" y="7674"/>
-                </a:lnTo>
-                <a:lnTo>
-                  <a:pt x="4799477" y="0"/>
-                </a:lnTo>
-                <a:lnTo>
-                  <a:pt x="4946785" y="13250"/>
-                </a:lnTo>
-                <a:lnTo>
-                  <a:pt x="5093253" y="47358"/>
-                </a:lnTo>
-                <a:lnTo>
-                  <a:pt x="5238142" y="102153"/>
-                </a:lnTo>
-                <a:lnTo>
-                  <a:pt x="5380725" y="177358"/>
-                </a:lnTo>
-                <a:lnTo>
-                  <a:pt x="5520282" y="272595"/>
-                </a:lnTo>
-                <a:lnTo>
-                  <a:pt x="5656111" y="387384"/>
-                </a:lnTo>
-                <a:lnTo>
-                  <a:pt x="5787528" y="521148"/>
-                </a:lnTo>
-                <a:lnTo>
-                  <a:pt x="5913872" y="673212"/>
-                </a:lnTo>
-                <a:lnTo>
-                  <a:pt x="6034506" y="842812"/>
-                </a:lnTo>
-                <a:lnTo>
-                  <a:pt x="6148823" y="1029093"/>
-                </a:lnTo>
-                <a:lnTo>
-                  <a:pt x="6256248" y="1231118"/>
-                </a:lnTo>
-                <a:lnTo>
-                  <a:pt x="6356240" y="1447870"/>
-                </a:lnTo>
-                <a:lnTo>
-                  <a:pt x="6448295" y="1678256"/>
-                </a:lnTo>
-                <a:lnTo>
-                  <a:pt x="6531950" y="1921118"/>
-                </a:lnTo>
-                <a:lnTo>
-                  <a:pt x="6606784" y="2175233"/>
-                </a:lnTo>
-                <a:lnTo>
-                  <a:pt x="6672419" y="2439321"/>
-                </a:lnTo>
-                <a:lnTo>
-                  <a:pt x="6728526" y="2712053"/>
-                </a:lnTo>
-                <a:lnTo>
-                  <a:pt x="6774823" y="2992055"/>
-                </a:lnTo>
-                <a:lnTo>
-                  <a:pt x="6811075" y="3277918"/>
-                </a:lnTo>
-                <a:lnTo>
-                  <a:pt x="6837100" y="3568203"/>
-                </a:lnTo>
-                <a:lnTo>
-                  <a:pt x="6852768" y="3861448"/>
-                </a:lnTo>
-                <a:lnTo>
-                  <a:pt x="6858000" y="4156177"/>
+                  <a:pt x="2397" y="1769830"/>
+                </a:lnTo>
+                <a:lnTo>
+                  <a:pt x="9578" y="1635426"/>
+                </a:lnTo>
+                <a:lnTo>
+                  <a:pt x="21507" y="1502379"/>
+                </a:lnTo>
+                <a:lnTo>
+                  <a:pt x="38122" y="1371358"/>
+                </a:lnTo>
+                <a:lnTo>
+                  <a:pt x="59341" y="1243024"/>
+                </a:lnTo>
+                <a:lnTo>
+                  <a:pt x="85057" y="1118022"/>
+                </a:lnTo>
+                <a:lnTo>
+                  <a:pt x="115140" y="996982"/>
+                </a:lnTo>
+                <a:lnTo>
+                  <a:pt x="149439" y="880512"/>
+                </a:lnTo>
+                <a:lnTo>
+                  <a:pt x="187781" y="769201"/>
+                </a:lnTo>
+                <a:lnTo>
+                  <a:pt x="229973" y="663607"/>
+                </a:lnTo>
+                <a:lnTo>
+                  <a:pt x="275802" y="564262"/>
+                </a:lnTo>
+                <a:lnTo>
+                  <a:pt x="325039" y="471667"/>
+                </a:lnTo>
+                <a:lnTo>
+                  <a:pt x="377434" y="386289"/>
+                </a:lnTo>
+                <a:lnTo>
+                  <a:pt x="432725" y="308555"/>
+                </a:lnTo>
+                <a:lnTo>
+                  <a:pt x="490632" y="238859"/>
+                </a:lnTo>
+                <a:lnTo>
+                  <a:pt x="550865" y="177551"/>
+                </a:lnTo>
+                <a:lnTo>
+                  <a:pt x="613120" y="124939"/>
+                </a:lnTo>
+                <a:lnTo>
+                  <a:pt x="677084" y="81289"/>
+                </a:lnTo>
+                <a:lnTo>
+                  <a:pt x="742434" y="46820"/>
+                </a:lnTo>
+                <a:lnTo>
+                  <a:pt x="808842" y="21706"/>
+                </a:lnTo>
+                <a:lnTo>
+                  <a:pt x="875973" y="6073"/>
+                </a:lnTo>
+                <a:lnTo>
+                  <a:pt x="943489" y="0"/>
+                </a:lnTo>
+                <a:lnTo>
+                  <a:pt x="1011051" y="3517"/>
+                </a:lnTo>
+                <a:lnTo>
+                  <a:pt x="1078318" y="16607"/>
+                </a:lnTo>
+                <a:lnTo>
+                  <a:pt x="1144951" y="39204"/>
+                </a:lnTo>
+                <a:lnTo>
+                  <a:pt x="1210616" y="71194"/>
+                </a:lnTo>
+                <a:lnTo>
+                  <a:pt x="1274981" y="112417"/>
+                </a:lnTo>
+                <a:lnTo>
+                  <a:pt x="1337722" y="162663"/>
+                </a:lnTo>
+                <a:lnTo>
+                  <a:pt x="1398524" y="221682"/>
+                </a:lnTo>
+                <a:lnTo>
+                  <a:pt x="1457081" y="289174"/>
+                </a:lnTo>
+                <a:lnTo>
+                  <a:pt x="1513097" y="364802"/>
+                </a:lnTo>
+                <a:lnTo>
+                  <a:pt x="1566291" y="448183"/>
+                </a:lnTo>
+                <a:lnTo>
+                  <a:pt x="1616394" y="538898"/>
+                </a:lnTo>
+                <a:lnTo>
+                  <a:pt x="1663155" y="636491"/>
+                </a:lnTo>
+                <a:lnTo>
+                  <a:pt x="1706338" y="740469"/>
+                </a:lnTo>
+                <a:lnTo>
+                  <a:pt x="1745726" y="850310"/>
+                </a:lnTo>
+                <a:lnTo>
+                  <a:pt x="1781121" y="965461"/>
+                </a:lnTo>
+                <a:lnTo>
+                  <a:pt x="1812343" y="1085341"/>
+                </a:lnTo>
+                <a:lnTo>
+                  <a:pt x="1839237" y="1209348"/>
+                </a:lnTo>
+                <a:lnTo>
+                  <a:pt x="1861666" y="1336857"/>
+                </a:lnTo>
+                <a:lnTo>
+                  <a:pt x="1879518" y="1467225"/>
+                </a:lnTo>
+                <a:lnTo>
+                  <a:pt x="1892703" y="1599797"/>
+                </a:lnTo>
+                <a:lnTo>
+                  <a:pt x="1901154" y="1733905"/>
+                </a:lnTo>
+                <a:lnTo>
+                  <a:pt x="1904829" y="1868875"/>
+                </a:lnTo>
+                <a:lnTo>
+                  <a:pt x="1903710" y="2004025"/>
+                </a:lnTo>
+                <a:lnTo>
+                  <a:pt x="1897801" y="2138677"/>
+                </a:lnTo>
+                <a:lnTo>
+                  <a:pt x="1887133" y="2272152"/>
+                </a:lnTo>
+                <a:lnTo>
+                  <a:pt x="1871760" y="2403778"/>
+                </a:lnTo>
+                <a:lnTo>
+                  <a:pt x="1851759" y="2532892"/>
+                </a:lnTo>
+                <a:lnTo>
+                  <a:pt x="1851759" y="2532892"/>
+                </a:lnTo>
+                <a:lnTo>
+                  <a:pt x="1841670" y="2580562"/>
+                </a:lnTo>
+                <a:lnTo>
+                  <a:pt x="1828423" y="2626211"/>
+                </a:lnTo>
+                <a:lnTo>
+                  <a:pt x="1812173" y="2669303"/>
+                </a:lnTo>
+                <a:lnTo>
+                  <a:pt x="1793109" y="2709336"/>
+                </a:lnTo>
+                <a:lnTo>
+                  <a:pt x="1771455" y="2745841"/>
+                </a:lnTo>
+                <a:lnTo>
+                  <a:pt x="1747463" y="2778391"/>
+                </a:lnTo>
+                <a:lnTo>
+                  <a:pt x="1721415" y="2806605"/>
+                </a:lnTo>
+                <a:lnTo>
+                  <a:pt x="1693615" y="2830154"/>
+                </a:lnTo>
+                <a:lnTo>
+                  <a:pt x="1664388" y="2848761"/>
+                </a:lnTo>
+                <a:lnTo>
+                  <a:pt x="1634076" y="2862210"/>
+                </a:lnTo>
+                <a:lnTo>
+                  <a:pt x="1603034" y="2870343"/>
+                </a:lnTo>
+                <a:lnTo>
+                  <a:pt x="1571625" y="2873064"/>
+                </a:lnTo>
+                <a:lnTo>
+                  <a:pt x="1540215" y="2870343"/>
+                </a:lnTo>
+                <a:lnTo>
+                  <a:pt x="1509173" y="2862210"/>
+                </a:lnTo>
+                <a:lnTo>
+                  <a:pt x="1478861" y="2848761"/>
+                </a:lnTo>
+                <a:lnTo>
+                  <a:pt x="1449634" y="2830154"/>
+                </a:lnTo>
+                <a:lnTo>
+                  <a:pt x="1421834" y="2806605"/>
+                </a:lnTo>
+                <a:lnTo>
+                  <a:pt x="1395786" y="2778391"/>
+                </a:lnTo>
+                <a:lnTo>
+                  <a:pt x="1371794" y="2745841"/>
+                </a:lnTo>
+                <a:lnTo>
+                  <a:pt x="1350140" y="2709336"/>
+                </a:lnTo>
+                <a:lnTo>
+                  <a:pt x="1331076" y="2669303"/>
+                </a:lnTo>
+                <a:lnTo>
+                  <a:pt x="1314826" y="2626211"/>
+                </a:lnTo>
+                <a:lnTo>
+                  <a:pt x="1301579" y="2580562"/>
+                </a:lnTo>
+                <a:lnTo>
+                  <a:pt x="1291490" y="2532892"/>
+                </a:lnTo>
+                <a:lnTo>
+                  <a:pt x="1291490" y="2532892"/>
+                </a:lnTo>
+                <a:lnTo>
+                  <a:pt x="1269800" y="2391162"/>
+                </a:lnTo>
+                <a:lnTo>
+                  <a:pt x="1253686" y="2246488"/>
+                </a:lnTo>
+                <a:lnTo>
+                  <a:pt x="1243244" y="2099746"/>
+                </a:lnTo>
+                <a:lnTo>
+                  <a:pt x="1238538" y="1951825"/>
+                </a:lnTo>
+                <a:lnTo>
+                  <a:pt x="1239597" y="1803620"/>
+                </a:lnTo>
+                <a:lnTo>
+                  <a:pt x="1246414" y="1656028"/>
+                </a:lnTo>
+                <a:lnTo>
+                  <a:pt x="1258947" y="1509943"/>
+                </a:lnTo>
+                <a:lnTo>
+                  <a:pt x="1277122" y="1366248"/>
+                </a:lnTo>
+                <a:lnTo>
+                  <a:pt x="1300827" y="1225815"/>
+                </a:lnTo>
+                <a:lnTo>
+                  <a:pt x="1329919" y="1089493"/>
+                </a:lnTo>
+                <a:lnTo>
+                  <a:pt x="1364223" y="958107"/>
+                </a:lnTo>
+                <a:lnTo>
+                  <a:pt x="1403531" y="832453"/>
+                </a:lnTo>
+                <a:lnTo>
+                  <a:pt x="1447604" y="713292"/>
+                </a:lnTo>
+                <a:lnTo>
+                  <a:pt x="1496176" y="601344"/>
+                </a:lnTo>
+                <a:lnTo>
+                  <a:pt x="1548953" y="497288"/>
+                </a:lnTo>
+                <a:lnTo>
+                  <a:pt x="1605615" y="401753"/>
+                </a:lnTo>
+                <a:lnTo>
+                  <a:pt x="1665819" y="315318"/>
+                </a:lnTo>
+                <a:lnTo>
+                  <a:pt x="1729201" y="238506"/>
+                </a:lnTo>
+                <a:lnTo>
+                  <a:pt x="1795377" y="171782"/>
+                </a:lnTo>
+                <a:lnTo>
+                  <a:pt x="1863947" y="115550"/>
+                </a:lnTo>
+                <a:lnTo>
+                  <a:pt x="1934495" y="70150"/>
+                </a:lnTo>
+                <a:lnTo>
+                  <a:pt x="2006594" y="35858"/>
+                </a:lnTo>
+                <a:lnTo>
+                  <a:pt x="2079809" y="12880"/>
+                </a:lnTo>
+                <a:lnTo>
+                  <a:pt x="2153694" y="1356"/>
+                </a:lnTo>
+                <a:lnTo>
+                  <a:pt x="2227805" y="1356"/>
+                </a:lnTo>
+                <a:lnTo>
+                  <a:pt x="2301690" y="12880"/>
+                </a:lnTo>
+                <a:lnTo>
+                  <a:pt x="2374905" y="35858"/>
+                </a:lnTo>
+                <a:lnTo>
+                  <a:pt x="2447004" y="70150"/>
+                </a:lnTo>
+                <a:lnTo>
+                  <a:pt x="2517552" y="115550"/>
+                </a:lnTo>
+                <a:lnTo>
+                  <a:pt x="2586122" y="171782"/>
+                </a:lnTo>
+                <a:lnTo>
+                  <a:pt x="2652298" y="238506"/>
+                </a:lnTo>
+                <a:lnTo>
+                  <a:pt x="2715680" y="315318"/>
+                </a:lnTo>
+                <a:lnTo>
+                  <a:pt x="2775884" y="401753"/>
+                </a:lnTo>
+                <a:lnTo>
+                  <a:pt x="2832546" y="497288"/>
+                </a:lnTo>
+                <a:lnTo>
+                  <a:pt x="2885323" y="601344"/>
+                </a:lnTo>
+                <a:lnTo>
+                  <a:pt x="2933895" y="713292"/>
+                </a:lnTo>
+                <a:lnTo>
+                  <a:pt x="2977968" y="832453"/>
+                </a:lnTo>
+                <a:lnTo>
+                  <a:pt x="3017276" y="958107"/>
+                </a:lnTo>
+                <a:lnTo>
+                  <a:pt x="3051580" y="1089493"/>
+                </a:lnTo>
+                <a:lnTo>
+                  <a:pt x="3080672" y="1225815"/>
+                </a:lnTo>
+                <a:lnTo>
+                  <a:pt x="3104377" y="1366248"/>
+                </a:lnTo>
+                <a:lnTo>
+                  <a:pt x="3122552" y="1509943"/>
+                </a:lnTo>
+                <a:lnTo>
+                  <a:pt x="3135085" y="1656028"/>
+                </a:lnTo>
+                <a:lnTo>
+                  <a:pt x="3141902" y="1803620"/>
+                </a:lnTo>
+                <a:lnTo>
+                  <a:pt x="3142961" y="1951825"/>
+                </a:lnTo>
+                <a:lnTo>
+                  <a:pt x="3138255" y="2099746"/>
+                </a:lnTo>
+                <a:lnTo>
+                  <a:pt x="3127813" y="2246488"/>
+                </a:lnTo>
+                <a:lnTo>
+                  <a:pt x="3111699" y="2391162"/>
+                </a:lnTo>
+                <a:lnTo>
+                  <a:pt x="3090009" y="2532892"/>
+                </a:lnTo>
+                <a:lnTo>
+                  <a:pt x="3090009" y="2532892"/>
+                </a:lnTo>
+                <a:lnTo>
+                  <a:pt x="3079920" y="2580562"/>
+                </a:lnTo>
+                <a:lnTo>
+                  <a:pt x="3066673" y="2626211"/>
+                </a:lnTo>
+                <a:lnTo>
+                  <a:pt x="3050423" y="2669303"/>
+                </a:lnTo>
+                <a:lnTo>
+                  <a:pt x="3031359" y="2709336"/>
+                </a:lnTo>
+                <a:lnTo>
+                  <a:pt x="3009705" y="2745841"/>
+                </a:lnTo>
+                <a:lnTo>
+                  <a:pt x="2985713" y="2778391"/>
+                </a:lnTo>
+                <a:lnTo>
+                  <a:pt x="2959665" y="2806605"/>
+                </a:lnTo>
+                <a:lnTo>
+                  <a:pt x="2931865" y="2830154"/>
+                </a:lnTo>
+                <a:lnTo>
+                  <a:pt x="2902638" y="2848761"/>
+                </a:lnTo>
+                <a:lnTo>
+                  <a:pt x="2872326" y="2862210"/>
+                </a:lnTo>
+                <a:lnTo>
+                  <a:pt x="2841284" y="2870343"/>
+                </a:lnTo>
+                <a:lnTo>
+                  <a:pt x="2809875" y="2873064"/>
+                </a:lnTo>
+                <a:lnTo>
+                  <a:pt x="2778465" y="2870343"/>
+                </a:lnTo>
+                <a:lnTo>
+                  <a:pt x="2747423" y="2862210"/>
+                </a:lnTo>
+                <a:lnTo>
+                  <a:pt x="2717111" y="2848761"/>
+                </a:lnTo>
+                <a:lnTo>
+                  <a:pt x="2687884" y="2830154"/>
+                </a:lnTo>
+                <a:lnTo>
+                  <a:pt x="2660084" y="2806605"/>
+                </a:lnTo>
+                <a:lnTo>
+                  <a:pt x="2634036" y="2778391"/>
+                </a:lnTo>
+                <a:lnTo>
+                  <a:pt x="2610044" y="2745841"/>
+                </a:lnTo>
+                <a:lnTo>
+                  <a:pt x="2588390" y="2709336"/>
+                </a:lnTo>
+                <a:lnTo>
+                  <a:pt x="2569326" y="2669303"/>
+                </a:lnTo>
+                <a:lnTo>
+                  <a:pt x="2553076" y="2626211"/>
+                </a:lnTo>
+                <a:lnTo>
+                  <a:pt x="2539829" y="2580562"/>
+                </a:lnTo>
+                <a:lnTo>
+                  <a:pt x="2529740" y="2532892"/>
+                </a:lnTo>
+                <a:lnTo>
+                  <a:pt x="2529740" y="2532892"/>
+                </a:lnTo>
+                <a:lnTo>
+                  <a:pt x="2508050" y="2391162"/>
+                </a:lnTo>
+                <a:lnTo>
+                  <a:pt x="2491936" y="2246488"/>
+                </a:lnTo>
+                <a:lnTo>
+                  <a:pt x="2481494" y="2099746"/>
+                </a:lnTo>
+                <a:lnTo>
+                  <a:pt x="2476788" y="1951825"/>
+                </a:lnTo>
+                <a:lnTo>
+                  <a:pt x="2477847" y="1803620"/>
+                </a:lnTo>
+                <a:lnTo>
+                  <a:pt x="2484664" y="1656028"/>
+                </a:lnTo>
+                <a:lnTo>
+                  <a:pt x="2497197" y="1509943"/>
+                </a:lnTo>
+                <a:lnTo>
+                  <a:pt x="2515372" y="1366248"/>
+                </a:lnTo>
+                <a:lnTo>
+                  <a:pt x="2539077" y="1225815"/>
+                </a:lnTo>
+                <a:lnTo>
+                  <a:pt x="2568169" y="1089493"/>
+                </a:lnTo>
+                <a:lnTo>
+                  <a:pt x="2602473" y="958107"/>
+                </a:lnTo>
+                <a:lnTo>
+                  <a:pt x="2641781" y="832453"/>
+                </a:lnTo>
+                <a:lnTo>
+                  <a:pt x="2685854" y="713292"/>
+                </a:lnTo>
+                <a:lnTo>
+                  <a:pt x="2734426" y="601344"/>
+                </a:lnTo>
+                <a:lnTo>
+                  <a:pt x="2787203" y="497288"/>
+                </a:lnTo>
+                <a:lnTo>
+                  <a:pt x="2843865" y="401753"/>
+                </a:lnTo>
+                <a:lnTo>
+                  <a:pt x="2904069" y="315318"/>
+                </a:lnTo>
+                <a:lnTo>
+                  <a:pt x="2967451" y="238506"/>
+                </a:lnTo>
+                <a:lnTo>
+                  <a:pt x="3033627" y="171782"/>
+                </a:lnTo>
+                <a:lnTo>
+                  <a:pt x="3102197" y="115550"/>
+                </a:lnTo>
+                <a:lnTo>
+                  <a:pt x="3172745" y="70150"/>
+                </a:lnTo>
+                <a:lnTo>
+                  <a:pt x="3244844" y="35858"/>
+                </a:lnTo>
+                <a:lnTo>
+                  <a:pt x="3318059" y="12880"/>
+                </a:lnTo>
+                <a:lnTo>
+                  <a:pt x="3391944" y="1356"/>
+                </a:lnTo>
+                <a:lnTo>
+                  <a:pt x="3466055" y="1356"/>
+                </a:lnTo>
+                <a:lnTo>
+                  <a:pt x="3539940" y="12880"/>
+                </a:lnTo>
+                <a:lnTo>
+                  <a:pt x="3613155" y="35858"/>
+                </a:lnTo>
+                <a:lnTo>
+                  <a:pt x="3685254" y="70150"/>
+                </a:lnTo>
+                <a:lnTo>
+                  <a:pt x="3755802" y="115550"/>
+                </a:lnTo>
+                <a:lnTo>
+                  <a:pt x="3824372" y="171782"/>
+                </a:lnTo>
+                <a:lnTo>
+                  <a:pt x="3890548" y="238506"/>
+                </a:lnTo>
+                <a:lnTo>
+                  <a:pt x="3953930" y="315318"/>
+                </a:lnTo>
+                <a:lnTo>
+                  <a:pt x="4014134" y="401753"/>
+                </a:lnTo>
+                <a:lnTo>
+                  <a:pt x="4070796" y="497288"/>
+                </a:lnTo>
+                <a:lnTo>
+                  <a:pt x="4123573" y="601344"/>
+                </a:lnTo>
+                <a:lnTo>
+                  <a:pt x="4172145" y="713292"/>
+                </a:lnTo>
+                <a:lnTo>
+                  <a:pt x="4216218" y="832453"/>
+                </a:lnTo>
+                <a:lnTo>
+                  <a:pt x="4255526" y="958107"/>
+                </a:lnTo>
+                <a:lnTo>
+                  <a:pt x="4289830" y="1089493"/>
+                </a:lnTo>
+                <a:lnTo>
+                  <a:pt x="4318922" y="1225815"/>
+                </a:lnTo>
+                <a:lnTo>
+                  <a:pt x="4342627" y="1366248"/>
+                </a:lnTo>
+                <a:lnTo>
+                  <a:pt x="4360802" y="1509943"/>
+                </a:lnTo>
+                <a:lnTo>
+                  <a:pt x="4373335" y="1656028"/>
+                </a:lnTo>
+                <a:lnTo>
+                  <a:pt x="4380152" y="1803620"/>
+                </a:lnTo>
+                <a:lnTo>
+                  <a:pt x="4381211" y="1951825"/>
+                </a:lnTo>
+                <a:lnTo>
+                  <a:pt x="4376505" y="2099746"/>
+                </a:lnTo>
+                <a:lnTo>
+                  <a:pt x="4366063" y="2246488"/>
+                </a:lnTo>
+                <a:lnTo>
+                  <a:pt x="4349949" y="2391162"/>
+                </a:lnTo>
+                <a:lnTo>
+                  <a:pt x="4328259" y="2532892"/>
+                </a:lnTo>
+                <a:lnTo>
+                  <a:pt x="4328259" y="2532892"/>
+                </a:lnTo>
+                <a:lnTo>
+                  <a:pt x="4318170" y="2580562"/>
+                </a:lnTo>
+                <a:lnTo>
+                  <a:pt x="4304923" y="2626211"/>
+                </a:lnTo>
+                <a:lnTo>
+                  <a:pt x="4288673" y="2669303"/>
+                </a:lnTo>
+                <a:lnTo>
+                  <a:pt x="4269609" y="2709336"/>
+                </a:lnTo>
+                <a:lnTo>
+                  <a:pt x="4247955" y="2745841"/>
+                </a:lnTo>
+                <a:lnTo>
+                  <a:pt x="4223963" y="2778391"/>
+                </a:lnTo>
+                <a:lnTo>
+                  <a:pt x="4197915" y="2806605"/>
+                </a:lnTo>
+                <a:lnTo>
+                  <a:pt x="4170115" y="2830154"/>
+                </a:lnTo>
+                <a:lnTo>
+                  <a:pt x="4140888" y="2848761"/>
+                </a:lnTo>
+                <a:lnTo>
+                  <a:pt x="4110576" y="2862210"/>
+                </a:lnTo>
+                <a:lnTo>
+                  <a:pt x="4079534" y="2870343"/>
+                </a:lnTo>
+                <a:lnTo>
+                  <a:pt x="4048125" y="2873064"/>
+                </a:lnTo>
+                <a:lnTo>
+                  <a:pt x="4016715" y="2870343"/>
+                </a:lnTo>
+                <a:lnTo>
+                  <a:pt x="3985673" y="2862210"/>
+                </a:lnTo>
+                <a:lnTo>
+                  <a:pt x="3955361" y="2848761"/>
+                </a:lnTo>
+                <a:lnTo>
+                  <a:pt x="3926134" y="2830154"/>
+                </a:lnTo>
+                <a:lnTo>
+                  <a:pt x="3898334" y="2806605"/>
+                </a:lnTo>
+                <a:lnTo>
+                  <a:pt x="3872286" y="2778391"/>
+                </a:lnTo>
+                <a:lnTo>
+                  <a:pt x="3848294" y="2745841"/>
+                </a:lnTo>
+                <a:lnTo>
+                  <a:pt x="3826640" y="2709336"/>
+                </a:lnTo>
+                <a:lnTo>
+                  <a:pt x="3807576" y="2669303"/>
+                </a:lnTo>
+                <a:lnTo>
+                  <a:pt x="3791326" y="2626211"/>
+                </a:lnTo>
+                <a:lnTo>
+                  <a:pt x="3778079" y="2580562"/>
+                </a:lnTo>
+                <a:lnTo>
+                  <a:pt x="3767990" y="2532892"/>
+                </a:lnTo>
+                <a:lnTo>
+                  <a:pt x="3767990" y="2532892"/>
+                </a:lnTo>
+                <a:lnTo>
+                  <a:pt x="3746300" y="2391162"/>
+                </a:lnTo>
+                <a:lnTo>
+                  <a:pt x="3730186" y="2246488"/>
+                </a:lnTo>
+                <a:lnTo>
+                  <a:pt x="3719744" y="2099746"/>
+                </a:lnTo>
+                <a:lnTo>
+                  <a:pt x="3715038" y="1951825"/>
+                </a:lnTo>
+                <a:lnTo>
+                  <a:pt x="3716097" y="1803620"/>
+                </a:lnTo>
+                <a:lnTo>
+                  <a:pt x="3722914" y="1656028"/>
+                </a:lnTo>
+                <a:lnTo>
+                  <a:pt x="3735447" y="1509943"/>
+                </a:lnTo>
+                <a:lnTo>
+                  <a:pt x="3753622" y="1366248"/>
+                </a:lnTo>
+                <a:lnTo>
+                  <a:pt x="3777327" y="1225815"/>
+                </a:lnTo>
+                <a:lnTo>
+                  <a:pt x="3806419" y="1089493"/>
+                </a:lnTo>
+                <a:lnTo>
+                  <a:pt x="3840723" y="958107"/>
+                </a:lnTo>
+                <a:lnTo>
+                  <a:pt x="3880031" y="832453"/>
+                </a:lnTo>
+                <a:lnTo>
+                  <a:pt x="3924104" y="713292"/>
+                </a:lnTo>
+                <a:lnTo>
+                  <a:pt x="3972676" y="601344"/>
+                </a:lnTo>
+                <a:lnTo>
+                  <a:pt x="4025453" y="497288"/>
+                </a:lnTo>
+                <a:lnTo>
+                  <a:pt x="4082115" y="401753"/>
+                </a:lnTo>
+                <a:lnTo>
+                  <a:pt x="4142319" y="315318"/>
+                </a:lnTo>
+                <a:lnTo>
+                  <a:pt x="4205701" y="238506"/>
+                </a:lnTo>
+                <a:lnTo>
+                  <a:pt x="4271877" y="171782"/>
+                </a:lnTo>
+                <a:lnTo>
+                  <a:pt x="4340447" y="115550"/>
+                </a:lnTo>
+                <a:lnTo>
+                  <a:pt x="4410995" y="70150"/>
+                </a:lnTo>
+                <a:lnTo>
+                  <a:pt x="4483094" y="35858"/>
+                </a:lnTo>
+                <a:lnTo>
+                  <a:pt x="4556309" y="12880"/>
+                </a:lnTo>
+                <a:lnTo>
+                  <a:pt x="4630194" y="1356"/>
+                </a:lnTo>
+                <a:lnTo>
+                  <a:pt x="4704305" y="1356"/>
+                </a:lnTo>
+                <a:lnTo>
+                  <a:pt x="4778190" y="12880"/>
+                </a:lnTo>
+                <a:lnTo>
+                  <a:pt x="4851405" y="35858"/>
+                </a:lnTo>
+                <a:lnTo>
+                  <a:pt x="4923504" y="70150"/>
+                </a:lnTo>
+                <a:lnTo>
+                  <a:pt x="4994052" y="115550"/>
+                </a:lnTo>
+                <a:lnTo>
+                  <a:pt x="5062622" y="171782"/>
+                </a:lnTo>
+                <a:lnTo>
+                  <a:pt x="5128798" y="238506"/>
+                </a:lnTo>
+                <a:lnTo>
+                  <a:pt x="5192180" y="315318"/>
+                </a:lnTo>
+                <a:lnTo>
+                  <a:pt x="5252384" y="401753"/>
+                </a:lnTo>
+                <a:lnTo>
+                  <a:pt x="5309046" y="497288"/>
+                </a:lnTo>
+                <a:lnTo>
+                  <a:pt x="5361823" y="601344"/>
+                </a:lnTo>
+                <a:lnTo>
+                  <a:pt x="5410395" y="713292"/>
+                </a:lnTo>
+                <a:lnTo>
+                  <a:pt x="5454468" y="832453"/>
+                </a:lnTo>
+                <a:lnTo>
+                  <a:pt x="5493776" y="958107"/>
+                </a:lnTo>
+                <a:lnTo>
+                  <a:pt x="5528080" y="1089493"/>
+                </a:lnTo>
+                <a:lnTo>
+                  <a:pt x="5557172" y="1225815"/>
+                </a:lnTo>
+                <a:lnTo>
+                  <a:pt x="5580877" y="1366248"/>
+                </a:lnTo>
+                <a:lnTo>
+                  <a:pt x="5599052" y="1509943"/>
+                </a:lnTo>
+                <a:lnTo>
+                  <a:pt x="5611585" y="1656028"/>
+                </a:lnTo>
+                <a:lnTo>
+                  <a:pt x="5618402" y="1803620"/>
+                </a:lnTo>
+                <a:lnTo>
+                  <a:pt x="5619461" y="1951825"/>
+                </a:lnTo>
+                <a:lnTo>
+                  <a:pt x="5614755" y="2099746"/>
+                </a:lnTo>
+                <a:lnTo>
+                  <a:pt x="5604313" y="2246488"/>
+                </a:lnTo>
+                <a:lnTo>
+                  <a:pt x="5588199" y="2391162"/>
+                </a:lnTo>
+                <a:lnTo>
+                  <a:pt x="5566509" y="2532892"/>
+                </a:lnTo>
+                <a:lnTo>
+                  <a:pt x="5566509" y="2532892"/>
+                </a:lnTo>
+                <a:lnTo>
+                  <a:pt x="5556420" y="2580562"/>
+                </a:lnTo>
+                <a:lnTo>
+                  <a:pt x="5543173" y="2626211"/>
+                </a:lnTo>
+                <a:lnTo>
+                  <a:pt x="5526923" y="2669303"/>
+                </a:lnTo>
+                <a:lnTo>
+                  <a:pt x="5507859" y="2709336"/>
+                </a:lnTo>
+                <a:lnTo>
+                  <a:pt x="5486205" y="2745841"/>
+                </a:lnTo>
+                <a:lnTo>
+                  <a:pt x="5462213" y="2778391"/>
+                </a:lnTo>
+                <a:lnTo>
+                  <a:pt x="5436165" y="2806605"/>
+                </a:lnTo>
+                <a:lnTo>
+                  <a:pt x="5408365" y="2830154"/>
+                </a:lnTo>
+                <a:lnTo>
+                  <a:pt x="5379138" y="2848761"/>
+                </a:lnTo>
+                <a:lnTo>
+                  <a:pt x="5348826" y="2862210"/>
+                </a:lnTo>
+                <a:lnTo>
+                  <a:pt x="5317784" y="2870343"/>
+                </a:lnTo>
+                <a:lnTo>
+                  <a:pt x="5286375" y="2873064"/>
+                </a:lnTo>
+                <a:lnTo>
+                  <a:pt x="5254965" y="2870343"/>
+                </a:lnTo>
+                <a:lnTo>
+                  <a:pt x="5223923" y="2862210"/>
+                </a:lnTo>
+                <a:lnTo>
+                  <a:pt x="5193611" y="2848761"/>
+                </a:lnTo>
+                <a:lnTo>
+                  <a:pt x="5164384" y="2830154"/>
+                </a:lnTo>
+                <a:lnTo>
+                  <a:pt x="5136584" y="2806605"/>
+                </a:lnTo>
+                <a:lnTo>
+                  <a:pt x="5110536" y="2778391"/>
+                </a:lnTo>
+                <a:lnTo>
+                  <a:pt x="5086544" y="2745841"/>
+                </a:lnTo>
+                <a:lnTo>
+                  <a:pt x="5064890" y="2709336"/>
+                </a:lnTo>
+                <a:lnTo>
+                  <a:pt x="5045826" y="2669303"/>
+                </a:lnTo>
+                <a:lnTo>
+                  <a:pt x="5029576" y="2626211"/>
+                </a:lnTo>
+                <a:lnTo>
+                  <a:pt x="5016329" y="2580562"/>
+                </a:lnTo>
+                <a:lnTo>
+                  <a:pt x="5006240" y="2532892"/>
+                </a:lnTo>
+                <a:lnTo>
+                  <a:pt x="5006240" y="2532892"/>
+                </a:lnTo>
+                <a:lnTo>
+                  <a:pt x="4986239" y="2403778"/>
+                </a:lnTo>
+                <a:lnTo>
+                  <a:pt x="4970866" y="2272152"/>
+                </a:lnTo>
+                <a:lnTo>
+                  <a:pt x="4960198" y="2138677"/>
+                </a:lnTo>
+                <a:lnTo>
+                  <a:pt x="4954289" y="2004025"/>
+                </a:lnTo>
+                <a:lnTo>
+                  <a:pt x="4953170" y="1868875"/>
+                </a:lnTo>
+                <a:lnTo>
+                  <a:pt x="4956845" y="1733905"/>
+                </a:lnTo>
+                <a:lnTo>
+                  <a:pt x="4965296" y="1599797"/>
+                </a:lnTo>
+                <a:lnTo>
+                  <a:pt x="4978481" y="1467225"/>
+                </a:lnTo>
+                <a:lnTo>
+                  <a:pt x="4996333" y="1336857"/>
+                </a:lnTo>
+                <a:lnTo>
+                  <a:pt x="5018762" y="1209348"/>
+                </a:lnTo>
+                <a:lnTo>
+                  <a:pt x="5045656" y="1085341"/>
+                </a:lnTo>
+                <a:lnTo>
+                  <a:pt x="5076878" y="965461"/>
+                </a:lnTo>
+                <a:lnTo>
+                  <a:pt x="5112273" y="850310"/>
+                </a:lnTo>
+                <a:lnTo>
+                  <a:pt x="5151661" y="740469"/>
+                </a:lnTo>
+                <a:lnTo>
+                  <a:pt x="5194844" y="636491"/>
+                </a:lnTo>
+                <a:lnTo>
+                  <a:pt x="5241605" y="538898"/>
+                </a:lnTo>
+                <a:lnTo>
+                  <a:pt x="5291708" y="448183"/>
+                </a:lnTo>
+                <a:lnTo>
+                  <a:pt x="5344902" y="364802"/>
+                </a:lnTo>
+                <a:lnTo>
+                  <a:pt x="5400918" y="289174"/>
+                </a:lnTo>
+                <a:lnTo>
+                  <a:pt x="5459475" y="221682"/>
+                </a:lnTo>
+                <a:lnTo>
+                  <a:pt x="5520277" y="162663"/>
+                </a:lnTo>
+                <a:lnTo>
+                  <a:pt x="5583018" y="112417"/>
+                </a:lnTo>
+                <a:lnTo>
+                  <a:pt x="5647383" y="71194"/>
+                </a:lnTo>
+                <a:lnTo>
+                  <a:pt x="5713048" y="39204"/>
+                </a:lnTo>
+                <a:lnTo>
+                  <a:pt x="5779681" y="16607"/>
+                </a:lnTo>
+                <a:lnTo>
+                  <a:pt x="5846948" y="3517"/>
+                </a:lnTo>
+                <a:lnTo>
+                  <a:pt x="5914510" y="0"/>
+                </a:lnTo>
+                <a:lnTo>
+                  <a:pt x="5982026" y="6073"/>
+                </a:lnTo>
+                <a:lnTo>
+                  <a:pt x="6049157" y="21706"/>
+                </a:lnTo>
+                <a:lnTo>
+                  <a:pt x="6115565" y="46820"/>
+                </a:lnTo>
+                <a:lnTo>
+                  <a:pt x="6180915" y="81289"/>
+                </a:lnTo>
+                <a:lnTo>
+                  <a:pt x="6244879" y="124939"/>
+                </a:lnTo>
+                <a:lnTo>
+                  <a:pt x="6307134" y="177551"/>
+                </a:lnTo>
+                <a:lnTo>
+                  <a:pt x="6367367" y="238859"/>
+                </a:lnTo>
+                <a:lnTo>
+                  <a:pt x="6425274" y="308555"/>
+                </a:lnTo>
+                <a:lnTo>
+                  <a:pt x="6480565" y="386289"/>
+                </a:lnTo>
+                <a:lnTo>
+                  <a:pt x="6532960" y="471667"/>
+                </a:lnTo>
+                <a:lnTo>
+                  <a:pt x="6582197" y="564262"/>
+                </a:lnTo>
+                <a:lnTo>
+                  <a:pt x="6628026" y="663607"/>
+                </a:lnTo>
+                <a:lnTo>
+                  <a:pt x="6670218" y="769201"/>
+                </a:lnTo>
+                <a:lnTo>
+                  <a:pt x="6708560" y="880512"/>
+                </a:lnTo>
+                <a:lnTo>
+                  <a:pt x="6742859" y="996982"/>
+                </a:lnTo>
+                <a:lnTo>
+                  <a:pt x="6772942" y="1118022"/>
+                </a:lnTo>
+                <a:lnTo>
+                  <a:pt x="6798658" y="1243024"/>
+                </a:lnTo>
+                <a:lnTo>
+                  <a:pt x="6819877" y="1371358"/>
+                </a:lnTo>
+                <a:lnTo>
+                  <a:pt x="6836492" y="1502379"/>
+                </a:lnTo>
+                <a:lnTo>
+                  <a:pt x="6848421" y="1635426"/>
+                </a:lnTo>
+                <a:lnTo>
+                  <a:pt x="6855602" y="1769830"/>
+                </a:lnTo>
+                <a:lnTo>
+                  <a:pt x="6858000" y="1904914"/>
                 </a:lnTo>
               </a:path>
             </a:pathLst>
@@ -3489,6 +4164,826 @@
           <a:ln w="4572">
             <a:solidFill>
               <a:srgbClr val="0000FF"/>
+            </a:solidFill>
+          </a:ln>
+          <a:effectLst/>
+        </p:spPr>
+        <p:style>
+          <a:lnRef idx="1">
+            <a:schemeClr val="accent1"/>
+          </a:lnRef>
+          <a:fillRef idx="3">
+            <a:schemeClr val="accent1"/>
+          </a:fillRef>
+          <a:effectRef idx="2">
+            <a:schemeClr val="accent1"/>
+          </a:effectRef>
+          <a:fontRef idx="minor">
+            <a:schemeClr val="lt1"/>
+          </a:fontRef>
+        </p:style>
+        <p:txBody>
+          <a:bodyPr rtlCol="0" anchor="ctr"/>
+          <a:lstStyle/>
+          <a:p>
+            <a:pPr algn="ctr"/>
+          </a:p>
+        </p:txBody>
+      </p:sp>
+      <p:sp>
+        <p:nvSpPr>
+          <p:cNvPr id="3" name="Freeform 2"/>
+          <p:cNvSpPr/>
+          <p:nvPr/>
+        </p:nvSpPr>
+        <p:spPr>
+          <a:xfrm>
+            <a:off x="1287396" y="2199648"/>
+            <a:ext cx="568600" cy="568672"/>
+          </a:xfrm>
+          <a:custGeom>
+            <a:avLst/>
+            <a:gdLst/>
+            <a:ahLst/>
+            <a:cxnLst/>
+            <a:rect l="l" t="t" r="r" b="b"/>
+            <a:pathLst>
+              <a:path w="568600" h="568672">
+                <a:moveTo>
+                  <a:pt x="568600" y="284336"/>
+                </a:moveTo>
+                <a:lnTo>
+                  <a:pt x="568028" y="302372"/>
+                </a:lnTo>
+                <a:lnTo>
+                  <a:pt x="566312" y="320335"/>
+                </a:lnTo>
+                <a:lnTo>
+                  <a:pt x="563461" y="338154"/>
+                </a:lnTo>
+                <a:lnTo>
+                  <a:pt x="559486" y="355755"/>
+                </a:lnTo>
+                <a:lnTo>
+                  <a:pt x="554402" y="373070"/>
+                </a:lnTo>
+                <a:lnTo>
+                  <a:pt x="548230" y="390026"/>
+                </a:lnTo>
+                <a:lnTo>
+                  <a:pt x="540995" y="406558"/>
+                </a:lnTo>
+                <a:lnTo>
+                  <a:pt x="532726" y="422597"/>
+                </a:lnTo>
+                <a:lnTo>
+                  <a:pt x="523457" y="438079"/>
+                </a:lnTo>
+                <a:lnTo>
+                  <a:pt x="513224" y="452942"/>
+                </a:lnTo>
+                <a:lnTo>
+                  <a:pt x="502070" y="467127"/>
+                </a:lnTo>
+                <a:lnTo>
+                  <a:pt x="490038" y="480575"/>
+                </a:lnTo>
+                <a:lnTo>
+                  <a:pt x="477177" y="493233"/>
+                </a:lnTo>
+                <a:lnTo>
+                  <a:pt x="463540" y="505050"/>
+                </a:lnTo>
+                <a:lnTo>
+                  <a:pt x="449180" y="515978"/>
+                </a:lnTo>
+                <a:lnTo>
+                  <a:pt x="434156" y="525974"/>
+                </a:lnTo>
+                <a:lnTo>
+                  <a:pt x="418529" y="534996"/>
+                </a:lnTo>
+                <a:lnTo>
+                  <a:pt x="402361" y="543010"/>
+                </a:lnTo>
+                <a:lnTo>
+                  <a:pt x="385717" y="549981"/>
+                </a:lnTo>
+                <a:lnTo>
+                  <a:pt x="368664" y="555883"/>
+                </a:lnTo>
+                <a:lnTo>
+                  <a:pt x="351272" y="560692"/>
+                </a:lnTo>
+                <a:lnTo>
+                  <a:pt x="333609" y="564387"/>
+                </a:lnTo>
+                <a:lnTo>
+                  <a:pt x="315748" y="566956"/>
+                </a:lnTo>
+                <a:lnTo>
+                  <a:pt x="297759" y="568386"/>
+                </a:lnTo>
+                <a:lnTo>
+                  <a:pt x="279717" y="568672"/>
+                </a:lnTo>
+                <a:lnTo>
+                  <a:pt x="261692" y="567813"/>
+                </a:lnTo>
+                <a:lnTo>
+                  <a:pt x="243758" y="565813"/>
+                </a:lnTo>
+                <a:lnTo>
+                  <a:pt x="225987" y="562680"/>
+                </a:lnTo>
+                <a:lnTo>
+                  <a:pt x="208451" y="558425"/>
+                </a:lnTo>
+                <a:lnTo>
+                  <a:pt x="191220" y="553067"/>
+                </a:lnTo>
+                <a:lnTo>
+                  <a:pt x="174363" y="546627"/>
+                </a:lnTo>
+                <a:lnTo>
+                  <a:pt x="157949" y="539131"/>
+                </a:lnTo>
+                <a:lnTo>
+                  <a:pt x="142043" y="530609"/>
+                </a:lnTo>
+                <a:lnTo>
+                  <a:pt x="126709" y="521095"/>
+                </a:lnTo>
+                <a:lnTo>
+                  <a:pt x="112010" y="510628"/>
+                </a:lnTo>
+                <a:lnTo>
+                  <a:pt x="98005" y="499250"/>
+                </a:lnTo>
+                <a:lnTo>
+                  <a:pt x="84749" y="487006"/>
+                </a:lnTo>
+                <a:lnTo>
+                  <a:pt x="72296" y="473946"/>
+                </a:lnTo>
+                <a:lnTo>
+                  <a:pt x="60697" y="460123"/>
+                </a:lnTo>
+                <a:lnTo>
+                  <a:pt x="49998" y="445592"/>
+                </a:lnTo>
+                <a:lnTo>
+                  <a:pt x="40242" y="430411"/>
+                </a:lnTo>
+                <a:lnTo>
+                  <a:pt x="31469" y="414643"/>
+                </a:lnTo>
+                <a:lnTo>
+                  <a:pt x="23713" y="398349"/>
+                </a:lnTo>
+                <a:lnTo>
+                  <a:pt x="17007" y="381597"/>
+                </a:lnTo>
+                <a:lnTo>
+                  <a:pt x="11376" y="364453"/>
+                </a:lnTo>
+                <a:lnTo>
+                  <a:pt x="6844" y="346986"/>
+                </a:lnTo>
+                <a:lnTo>
+                  <a:pt x="3429" y="329267"/>
+                </a:lnTo>
+                <a:lnTo>
+                  <a:pt x="1145" y="311367"/>
+                </a:lnTo>
+                <a:lnTo>
+                  <a:pt x="0" y="293359"/>
+                </a:lnTo>
+                <a:lnTo>
+                  <a:pt x="0" y="275314"/>
+                </a:lnTo>
+                <a:lnTo>
+                  <a:pt x="1145" y="257305"/>
+                </a:lnTo>
+                <a:lnTo>
+                  <a:pt x="3429" y="239405"/>
+                </a:lnTo>
+                <a:lnTo>
+                  <a:pt x="6844" y="221686"/>
+                </a:lnTo>
+                <a:lnTo>
+                  <a:pt x="11376" y="204219"/>
+                </a:lnTo>
+                <a:lnTo>
+                  <a:pt x="17007" y="187075"/>
+                </a:lnTo>
+                <a:lnTo>
+                  <a:pt x="23713" y="170323"/>
+                </a:lnTo>
+                <a:lnTo>
+                  <a:pt x="31469" y="154030"/>
+                </a:lnTo>
+                <a:lnTo>
+                  <a:pt x="40242" y="138261"/>
+                </a:lnTo>
+                <a:lnTo>
+                  <a:pt x="49998" y="123080"/>
+                </a:lnTo>
+                <a:lnTo>
+                  <a:pt x="60697" y="108549"/>
+                </a:lnTo>
+                <a:lnTo>
+                  <a:pt x="72296" y="94726"/>
+                </a:lnTo>
+                <a:lnTo>
+                  <a:pt x="84749" y="81666"/>
+                </a:lnTo>
+                <a:lnTo>
+                  <a:pt x="98005" y="69422"/>
+                </a:lnTo>
+                <a:lnTo>
+                  <a:pt x="112010" y="58044"/>
+                </a:lnTo>
+                <a:lnTo>
+                  <a:pt x="126709" y="47577"/>
+                </a:lnTo>
+                <a:lnTo>
+                  <a:pt x="142043" y="38063"/>
+                </a:lnTo>
+                <a:lnTo>
+                  <a:pt x="157949" y="29541"/>
+                </a:lnTo>
+                <a:lnTo>
+                  <a:pt x="174363" y="22045"/>
+                </a:lnTo>
+                <a:lnTo>
+                  <a:pt x="191220" y="15605"/>
+                </a:lnTo>
+                <a:lnTo>
+                  <a:pt x="208451" y="10247"/>
+                </a:lnTo>
+                <a:lnTo>
+                  <a:pt x="225987" y="5993"/>
+                </a:lnTo>
+                <a:lnTo>
+                  <a:pt x="243758" y="2859"/>
+                </a:lnTo>
+                <a:lnTo>
+                  <a:pt x="261692" y="859"/>
+                </a:lnTo>
+                <a:lnTo>
+                  <a:pt x="279717" y="0"/>
+                </a:lnTo>
+                <a:lnTo>
+                  <a:pt x="297759" y="287"/>
+                </a:lnTo>
+                <a:lnTo>
+                  <a:pt x="315748" y="1717"/>
+                </a:lnTo>
+                <a:lnTo>
+                  <a:pt x="333609" y="4285"/>
+                </a:lnTo>
+                <a:lnTo>
+                  <a:pt x="351272" y="7981"/>
+                </a:lnTo>
+                <a:lnTo>
+                  <a:pt x="368664" y="12789"/>
+                </a:lnTo>
+                <a:lnTo>
+                  <a:pt x="385717" y="18691"/>
+                </a:lnTo>
+                <a:lnTo>
+                  <a:pt x="402361" y="25663"/>
+                </a:lnTo>
+                <a:lnTo>
+                  <a:pt x="418529" y="33676"/>
+                </a:lnTo>
+                <a:lnTo>
+                  <a:pt x="434156" y="42698"/>
+                </a:lnTo>
+                <a:lnTo>
+                  <a:pt x="449180" y="52694"/>
+                </a:lnTo>
+                <a:lnTo>
+                  <a:pt x="463540" y="63622"/>
+                </a:lnTo>
+                <a:lnTo>
+                  <a:pt x="477177" y="75439"/>
+                </a:lnTo>
+                <a:lnTo>
+                  <a:pt x="490038" y="88097"/>
+                </a:lnTo>
+                <a:lnTo>
+                  <a:pt x="502070" y="101546"/>
+                </a:lnTo>
+                <a:lnTo>
+                  <a:pt x="513224" y="115730"/>
+                </a:lnTo>
+                <a:lnTo>
+                  <a:pt x="523457" y="130593"/>
+                </a:lnTo>
+                <a:lnTo>
+                  <a:pt x="532726" y="146076"/>
+                </a:lnTo>
+                <a:lnTo>
+                  <a:pt x="540995" y="162115"/>
+                </a:lnTo>
+                <a:lnTo>
+                  <a:pt x="548230" y="178646"/>
+                </a:lnTo>
+                <a:lnTo>
+                  <a:pt x="554402" y="195603"/>
+                </a:lnTo>
+                <a:lnTo>
+                  <a:pt x="559486" y="212917"/>
+                </a:lnTo>
+                <a:lnTo>
+                  <a:pt x="563461" y="230518"/>
+                </a:lnTo>
+                <a:lnTo>
+                  <a:pt x="566312" y="248337"/>
+                </a:lnTo>
+                <a:lnTo>
+                  <a:pt x="568028" y="266300"/>
+                </a:lnTo>
+                <a:lnTo>
+                  <a:pt x="568600" y="284336"/>
+                </a:lnTo>
+              </a:path>
+            </a:pathLst>
+          </a:custGeom>
+          <a:noFill/>
+          <a:ln w="9144">
+            <a:solidFill>
+              <a:srgbClr val="FFD700"/>
+            </a:solidFill>
+          </a:ln>
+          <a:effectLst/>
+        </p:spPr>
+        <p:style>
+          <a:lnRef idx="1">
+            <a:schemeClr val="accent1"/>
+          </a:lnRef>
+          <a:fillRef idx="3">
+            <a:schemeClr val="accent1"/>
+          </a:fillRef>
+          <a:effectRef idx="2">
+            <a:schemeClr val="accent1"/>
+          </a:effectRef>
+          <a:fontRef idx="minor">
+            <a:schemeClr val="lt1"/>
+          </a:fontRef>
+        </p:style>
+        <p:txBody>
+          <a:bodyPr rtlCol="0" anchor="ctr"/>
+          <a:lstStyle/>
+          <a:p>
+            <a:pPr algn="ctr"/>
+          </a:p>
+        </p:txBody>
+      </p:sp>
+      <p:sp>
+        <p:nvSpPr>
+          <p:cNvPr id="4" name="Freeform 3"/>
+          <p:cNvSpPr/>
+          <p:nvPr/>
+        </p:nvSpPr>
+        <p:spPr>
+          <a:xfrm>
+            <a:off x="1280913" y="1942377"/>
+            <a:ext cx="581569" cy="930629"/>
+          </a:xfrm>
+          <a:custGeom>
+            <a:avLst/>
+            <a:gdLst/>
+            <a:ahLst/>
+            <a:cxnLst/>
+            <a:rect l="l" t="t" r="r" b="b"/>
+            <a:pathLst>
+              <a:path w="581569" h="930629">
+                <a:moveTo>
+                  <a:pt x="581569" y="465314"/>
+                </a:moveTo>
+                <a:lnTo>
+                  <a:pt x="580984" y="494830"/>
+                </a:lnTo>
+                <a:lnTo>
+                  <a:pt x="579229" y="524227"/>
+                </a:lnTo>
+                <a:lnTo>
+                  <a:pt x="576313" y="553387"/>
+                </a:lnTo>
+                <a:lnTo>
+                  <a:pt x="572247" y="582192"/>
+                </a:lnTo>
+                <a:lnTo>
+                  <a:pt x="567047" y="610526"/>
+                </a:lnTo>
+                <a:lnTo>
+                  <a:pt x="560735" y="638276"/>
+                </a:lnTo>
+                <a:lnTo>
+                  <a:pt x="553335" y="665329"/>
+                </a:lnTo>
+                <a:lnTo>
+                  <a:pt x="544878" y="691577"/>
+                </a:lnTo>
+                <a:lnTo>
+                  <a:pt x="535397" y="716914"/>
+                </a:lnTo>
+                <a:lnTo>
+                  <a:pt x="524931" y="741238"/>
+                </a:lnTo>
+                <a:lnTo>
+                  <a:pt x="513522" y="764450"/>
+                </a:lnTo>
+                <a:lnTo>
+                  <a:pt x="501215" y="786458"/>
+                </a:lnTo>
+                <a:lnTo>
+                  <a:pt x="488061" y="807173"/>
+                </a:lnTo>
+                <a:lnTo>
+                  <a:pt x="474113" y="826512"/>
+                </a:lnTo>
+                <a:lnTo>
+                  <a:pt x="459426" y="844396"/>
+                </a:lnTo>
+                <a:lnTo>
+                  <a:pt x="444059" y="860753"/>
+                </a:lnTo>
+                <a:lnTo>
+                  <a:pt x="428075" y="875519"/>
+                </a:lnTo>
+                <a:lnTo>
+                  <a:pt x="411538" y="888632"/>
+                </a:lnTo>
+                <a:lnTo>
+                  <a:pt x="394515" y="900041"/>
+                </a:lnTo>
+                <a:lnTo>
+                  <a:pt x="377073" y="909700"/>
+                </a:lnTo>
+                <a:lnTo>
+                  <a:pt x="359284" y="917569"/>
+                </a:lnTo>
+                <a:lnTo>
+                  <a:pt x="341218" y="923617"/>
+                </a:lnTo>
+                <a:lnTo>
+                  <a:pt x="322950" y="927820"/>
+                </a:lnTo>
+                <a:lnTo>
+                  <a:pt x="304551" y="930160"/>
+                </a:lnTo>
+                <a:lnTo>
+                  <a:pt x="286097" y="930629"/>
+                </a:lnTo>
+                <a:lnTo>
+                  <a:pt x="267661" y="929223"/>
+                </a:lnTo>
+                <a:lnTo>
+                  <a:pt x="249318" y="925950"/>
+                </a:lnTo>
+                <a:lnTo>
+                  <a:pt x="231142" y="920822"/>
+                </a:lnTo>
+                <a:lnTo>
+                  <a:pt x="213205" y="913860"/>
+                </a:lnTo>
+                <a:lnTo>
+                  <a:pt x="195581" y="905092"/>
+                </a:lnTo>
+                <a:lnTo>
+                  <a:pt x="178340" y="894553"/>
+                </a:lnTo>
+                <a:lnTo>
+                  <a:pt x="161551" y="882285"/>
+                </a:lnTo>
+                <a:lnTo>
+                  <a:pt x="145283" y="868339"/>
+                </a:lnTo>
+                <a:lnTo>
+                  <a:pt x="129599" y="852770"/>
+                </a:lnTo>
+                <a:lnTo>
+                  <a:pt x="114565" y="835640"/>
+                </a:lnTo>
+                <a:lnTo>
+                  <a:pt x="100240" y="817020"/>
+                </a:lnTo>
+                <a:lnTo>
+                  <a:pt x="86682" y="796983"/>
+                </a:lnTo>
+                <a:lnTo>
+                  <a:pt x="73945" y="775611"/>
+                </a:lnTo>
+                <a:lnTo>
+                  <a:pt x="62082" y="752989"/>
+                </a:lnTo>
+                <a:lnTo>
+                  <a:pt x="51139" y="729209"/>
+                </a:lnTo>
+                <a:lnTo>
+                  <a:pt x="41160" y="704366"/>
+                </a:lnTo>
+                <a:lnTo>
+                  <a:pt x="32187" y="678561"/>
+                </a:lnTo>
+                <a:lnTo>
+                  <a:pt x="24254" y="651897"/>
+                </a:lnTo>
+                <a:lnTo>
+                  <a:pt x="17394" y="624481"/>
+                </a:lnTo>
+                <a:lnTo>
+                  <a:pt x="11635" y="596425"/>
+                </a:lnTo>
+                <a:lnTo>
+                  <a:pt x="7000" y="567841"/>
+                </a:lnTo>
+                <a:lnTo>
+                  <a:pt x="3507" y="538844"/>
+                </a:lnTo>
+                <a:lnTo>
+                  <a:pt x="1171" y="509551"/>
+                </a:lnTo>
+                <a:lnTo>
+                  <a:pt x="0" y="480080"/>
+                </a:lnTo>
+                <a:lnTo>
+                  <a:pt x="0" y="450549"/>
+                </a:lnTo>
+                <a:lnTo>
+                  <a:pt x="1171" y="421078"/>
+                </a:lnTo>
+                <a:lnTo>
+                  <a:pt x="3507" y="391785"/>
+                </a:lnTo>
+                <a:lnTo>
+                  <a:pt x="7000" y="362788"/>
+                </a:lnTo>
+                <a:lnTo>
+                  <a:pt x="11635" y="334204"/>
+                </a:lnTo>
+                <a:lnTo>
+                  <a:pt x="17394" y="306148"/>
+                </a:lnTo>
+                <a:lnTo>
+                  <a:pt x="24254" y="278732"/>
+                </a:lnTo>
+                <a:lnTo>
+                  <a:pt x="32187" y="252068"/>
+                </a:lnTo>
+                <a:lnTo>
+                  <a:pt x="41160" y="226263"/>
+                </a:lnTo>
+                <a:lnTo>
+                  <a:pt x="51139" y="201420"/>
+                </a:lnTo>
+                <a:lnTo>
+                  <a:pt x="62082" y="177640"/>
+                </a:lnTo>
+                <a:lnTo>
+                  <a:pt x="73945" y="155018"/>
+                </a:lnTo>
+                <a:lnTo>
+                  <a:pt x="86682" y="133646"/>
+                </a:lnTo>
+                <a:lnTo>
+                  <a:pt x="100240" y="113609"/>
+                </a:lnTo>
+                <a:lnTo>
+                  <a:pt x="114565" y="94989"/>
+                </a:lnTo>
+                <a:lnTo>
+                  <a:pt x="129599" y="77859"/>
+                </a:lnTo>
+                <a:lnTo>
+                  <a:pt x="145283" y="62290"/>
+                </a:lnTo>
+                <a:lnTo>
+                  <a:pt x="161551" y="48343"/>
+                </a:lnTo>
+                <a:lnTo>
+                  <a:pt x="178340" y="36076"/>
+                </a:lnTo>
+                <a:lnTo>
+                  <a:pt x="195581" y="25537"/>
+                </a:lnTo>
+                <a:lnTo>
+                  <a:pt x="213205" y="16769"/>
+                </a:lnTo>
+                <a:lnTo>
+                  <a:pt x="231142" y="9807"/>
+                </a:lnTo>
+                <a:lnTo>
+                  <a:pt x="249318" y="4679"/>
+                </a:lnTo>
+                <a:lnTo>
+                  <a:pt x="267661" y="1406"/>
+                </a:lnTo>
+                <a:lnTo>
+                  <a:pt x="286097" y="0"/>
+                </a:lnTo>
+                <a:lnTo>
+                  <a:pt x="304551" y="469"/>
+                </a:lnTo>
+                <a:lnTo>
+                  <a:pt x="322950" y="2809"/>
+                </a:lnTo>
+                <a:lnTo>
+                  <a:pt x="341218" y="7012"/>
+                </a:lnTo>
+                <a:lnTo>
+                  <a:pt x="359284" y="13060"/>
+                </a:lnTo>
+                <a:lnTo>
+                  <a:pt x="377073" y="20929"/>
+                </a:lnTo>
+                <a:lnTo>
+                  <a:pt x="394515" y="30588"/>
+                </a:lnTo>
+                <a:lnTo>
+                  <a:pt x="411538" y="41997"/>
+                </a:lnTo>
+                <a:lnTo>
+                  <a:pt x="428075" y="55110"/>
+                </a:lnTo>
+                <a:lnTo>
+                  <a:pt x="444059" y="69875"/>
+                </a:lnTo>
+                <a:lnTo>
+                  <a:pt x="459426" y="86233"/>
+                </a:lnTo>
+                <a:lnTo>
+                  <a:pt x="474113" y="104117"/>
+                </a:lnTo>
+                <a:lnTo>
+                  <a:pt x="488061" y="123456"/>
+                </a:lnTo>
+                <a:lnTo>
+                  <a:pt x="501215" y="144171"/>
+                </a:lnTo>
+                <a:lnTo>
+                  <a:pt x="513522" y="166179"/>
+                </a:lnTo>
+                <a:lnTo>
+                  <a:pt x="524931" y="189391"/>
+                </a:lnTo>
+                <a:lnTo>
+                  <a:pt x="535397" y="213715"/>
+                </a:lnTo>
+                <a:lnTo>
+                  <a:pt x="544878" y="239052"/>
+                </a:lnTo>
+                <a:lnTo>
+                  <a:pt x="553335" y="265300"/>
+                </a:lnTo>
+                <a:lnTo>
+                  <a:pt x="560735" y="292353"/>
+                </a:lnTo>
+                <a:lnTo>
+                  <a:pt x="567047" y="320103"/>
+                </a:lnTo>
+                <a:lnTo>
+                  <a:pt x="572247" y="348437"/>
+                </a:lnTo>
+                <a:lnTo>
+                  <a:pt x="576313" y="377242"/>
+                </a:lnTo>
+                <a:lnTo>
+                  <a:pt x="579229" y="406402"/>
+                </a:lnTo>
+                <a:lnTo>
+                  <a:pt x="580984" y="435799"/>
+                </a:lnTo>
+                <a:lnTo>
+                  <a:pt x="581569" y="465314"/>
+                </a:lnTo>
+              </a:path>
+            </a:pathLst>
+          </a:custGeom>
+          <a:noFill/>
+          <a:ln w="9144">
+            <a:solidFill>
+              <a:srgbClr val="8A2BE2"/>
+            </a:solidFill>
+          </a:ln>
+          <a:effectLst/>
+        </p:spPr>
+        <p:style>
+          <a:lnRef idx="1">
+            <a:schemeClr val="accent1"/>
+          </a:lnRef>
+          <a:fillRef idx="3">
+            <a:schemeClr val="accent1"/>
+          </a:fillRef>
+          <a:effectRef idx="2">
+            <a:schemeClr val="accent1"/>
+          </a:effectRef>
+          <a:fontRef idx="minor">
+            <a:schemeClr val="lt1"/>
+          </a:fontRef>
+        </p:style>
+        <p:txBody>
+          <a:bodyPr rtlCol="0" anchor="ctr"/>
+          <a:lstStyle/>
+          <a:p>
+            <a:pPr algn="ctr"/>
+          </a:p>
+        </p:txBody>
+      </p:sp>
+      <p:sp>
+        <p:nvSpPr>
+          <p:cNvPr id="5" name="Freeform 4"/>
+          <p:cNvSpPr/>
+          <p:nvPr/>
+        </p:nvSpPr>
+        <p:spPr>
+          <a:xfrm>
+            <a:off x="1571625" y="2483984"/>
+            <a:ext cx="280134" cy="48908"/>
+          </a:xfrm>
+          <a:custGeom>
+            <a:avLst/>
+            <a:gdLst/>
+            <a:ahLst/>
+            <a:cxnLst/>
+            <a:rect l="l" t="t" r="r" b="b"/>
+            <a:pathLst>
+              <a:path w="280134" h="48908">
+                <a:moveTo>
+                  <a:pt x="0" y="0"/>
+                </a:moveTo>
+                <a:lnTo>
+                  <a:pt x="280134" y="48908"/>
+                </a:lnTo>
+              </a:path>
+            </a:pathLst>
+          </a:custGeom>
+          <a:noFill/>
+          <a:ln w="9144">
+            <a:solidFill>
+              <a:srgbClr val="5F9EA0"/>
+            </a:solidFill>
+          </a:ln>
+          <a:effectLst/>
+        </p:spPr>
+        <p:style>
+          <a:lnRef idx="1">
+            <a:schemeClr val="accent1"/>
+          </a:lnRef>
+          <a:fillRef idx="3">
+            <a:schemeClr val="accent1"/>
+          </a:fillRef>
+          <a:effectRef idx="2">
+            <a:schemeClr val="accent1"/>
+          </a:effectRef>
+          <a:fontRef idx="minor">
+            <a:schemeClr val="lt1"/>
+          </a:fontRef>
+        </p:style>
+        <p:txBody>
+          <a:bodyPr rtlCol="0" anchor="ctr"/>
+          <a:lstStyle/>
+          <a:p>
+            <a:pPr algn="ctr"/>
+          </a:p>
+        </p:txBody>
+      </p:sp>
+      <p:sp>
+        <p:nvSpPr>
+          <p:cNvPr id="6" name="Freeform 5"/>
+          <p:cNvSpPr/>
+          <p:nvPr/>
+        </p:nvSpPr>
+        <p:spPr>
+          <a:xfrm>
+            <a:off x="1291490" y="2483984"/>
+            <a:ext cx="280135" cy="48908"/>
+          </a:xfrm>
+          <a:custGeom>
+            <a:avLst/>
+            <a:gdLst/>
+            <a:ahLst/>
+            <a:cxnLst/>
+            <a:rect l="l" t="t" r="r" b="b"/>
+            <a:pathLst>
+              <a:path w="280135" h="48908">
+                <a:moveTo>
+                  <a:pt x="280135" y="0"/>
+                </a:moveTo>
+                <a:lnTo>
+                  <a:pt x="0" y="48908"/>
+                </a:lnTo>
+              </a:path>
+            </a:pathLst>
+          </a:custGeom>
+          <a:noFill/>
+          <a:ln w="9144">
+            <a:solidFill>
+              <a:srgbClr val="5F9EA0"/>
             </a:solidFill>
           </a:ln>
           <a:effectLst/>

--- a/test/c_es_up.pptx
+++ b/test/c_es_up.pptx
@@ -4161,7 +4161,7 @@
             </a:pathLst>
           </a:custGeom>
           <a:noFill/>
-          <a:ln w="4572">
+          <a:ln w="9144">
             <a:solidFill>
               <a:srgbClr val="0000FF"/>
             </a:solidFill>
